--- a/Jasons-Restructure/week-4/day-3-feature-engineering/1-slides/powerpoint/W4D3-slides.pptx
+++ b/Jasons-Restructure/week-4/day-3-feature-engineering/1-slides/powerpoint/W4D3-slides.pptx
@@ -12258,7 +12258,7 @@
           <a:p>
             <a:r>
               <a:rPr lang="en-US" dirty="0"/>
-              <a:t>Quiz 3 Q18 says about 22σ; the recipe gives 28.9σ. Five months can't tell the yearly warming from the season.</a:t>
+              <a:t>The code book says about 22σ; the recipe gives 28.9σ (Quiz 3 Q18 uses the real number). Five months can't tell the yearly warming from the season.</a:t>
             </a:r>
             <a:endParaRPr lang="en-US" dirty="0"/>
           </a:p>
